--- a/PUM2/Aktualne/Wykłady/Wyklad3.pptx
+++ b/PUM2/Aktualne/Wykłady/Wyklad3.pptx
@@ -177,6 +177,11 @@
       </a:defRPr>
     </a:lvl9pPr>
   </p:defaultTextStyle>
+  <p:extLst>
+    <p:ext uri="{EFAFB233-063F-42B5-8137-9DF3F51BA10A}">
+      <p15:sldGuideLst xmlns:p15="http://schemas.microsoft.com/office/powerpoint/2012/main"/>
+    </p:ext>
+  </p:extLst>
 </p:presentation>
 </file>
 
@@ -3389,7 +3394,7 @@
           <a:lstStyle/>
           <a:p>
             <a:fld id="{91017B01-0C30-B241-B19F-621BE4770608}" type="datetimeFigureOut">
-              <a:t>15.10.2026</a:t>
+              <a:t>22.10.2026</a:t>
             </a:fld>
             <a:endParaRPr/>
           </a:p>
@@ -3584,7 +3589,7 @@
           <a:lstStyle/>
           <a:p>
             <a:fld id="{91017B01-0C30-B241-B19F-621BE4770608}" type="datetimeFigureOut">
-              <a:t>15.10.2026</a:t>
+              <a:t>22.10.2026</a:t>
             </a:fld>
             <a:endParaRPr/>
           </a:p>
@@ -3789,7 +3794,7 @@
           <a:lstStyle/>
           <a:p>
             <a:fld id="{91017B01-0C30-B241-B19F-621BE4770608}" type="datetimeFigureOut">
-              <a:t>15.10.2026</a:t>
+              <a:t>22.10.2026</a:t>
             </a:fld>
             <a:endParaRPr/>
           </a:p>
@@ -3984,7 +3989,7 @@
           <a:lstStyle/>
           <a:p>
             <a:fld id="{91017B01-0C30-B241-B19F-621BE4770608}" type="datetimeFigureOut">
-              <a:t>15.10.2026</a:t>
+              <a:t>22.10.2026</a:t>
             </a:fld>
             <a:endParaRPr/>
           </a:p>
@@ -4253,7 +4258,7 @@
           <a:lstStyle/>
           <a:p>
             <a:fld id="{91017B01-0C30-B241-B19F-621BE4770608}" type="datetimeFigureOut">
-              <a:t>15.10.2026</a:t>
+              <a:t>22.10.2026</a:t>
             </a:fld>
             <a:endParaRPr/>
           </a:p>
@@ -4594,7 +4599,7 @@
           <a:lstStyle/>
           <a:p>
             <a:fld id="{91017B01-0C30-B241-B19F-621BE4770608}" type="datetimeFigureOut">
-              <a:t>15.10.2026</a:t>
+              <a:t>22.10.2026</a:t>
             </a:fld>
             <a:endParaRPr/>
           </a:p>
@@ -5084,7 +5089,7 @@
           <a:lstStyle/>
           <a:p>
             <a:fld id="{91017B01-0C30-B241-B19F-621BE4770608}" type="datetimeFigureOut">
-              <a:t>15.10.2026</a:t>
+              <a:t>22.10.2026</a:t>
             </a:fld>
             <a:endParaRPr/>
           </a:p>
@@ -5217,7 +5222,7 @@
           <a:lstStyle/>
           <a:p>
             <a:fld id="{91017B01-0C30-B241-B19F-621BE4770608}" type="datetimeFigureOut">
-              <a:t>15.10.2026</a:t>
+              <a:t>22.10.2026</a:t>
             </a:fld>
             <a:endParaRPr/>
           </a:p>
@@ -5323,7 +5328,7 @@
           <a:lstStyle/>
           <a:p>
             <a:fld id="{91017B01-0C30-B241-B19F-621BE4770608}" type="datetimeFigureOut">
-              <a:t>15.10.2026</a:t>
+              <a:t>22.10.2026</a:t>
             </a:fld>
             <a:endParaRPr/>
           </a:p>
@@ -5643,7 +5648,7 @@
           <a:lstStyle/>
           <a:p>
             <a:fld id="{91017B01-0C30-B241-B19F-621BE4770608}" type="datetimeFigureOut">
-              <a:t>15.10.2026</a:t>
+              <a:t>22.10.2026</a:t>
             </a:fld>
             <a:endParaRPr/>
           </a:p>
@@ -5927,7 +5932,7 @@
           <a:lstStyle/>
           <a:p>
             <a:fld id="{91017B01-0C30-B241-B19F-621BE4770608}" type="datetimeFigureOut">
-              <a:t>15.10.2026</a:t>
+              <a:t>22.10.2026</a:t>
             </a:fld>
             <a:endParaRPr/>
           </a:p>
@@ -6166,7 +6171,7 @@
           </a:lstStyle>
           <a:p>
             <a:fld id="{91017B01-0C30-B241-B19F-621BE4770608}" type="datetimeFigureOut">
-              <a:t>15.10.2026</a:t>
+              <a:t>22.10.2026</a:t>
             </a:fld>
             <a:endParaRPr/>
           </a:p>
@@ -12715,66 +12720,6 @@
             </a:pPr>
             <a:r>
               <a:t>Rodzic nadal czeka na zakończenie swoich dzieci.</a:t>
-            </a:r>
-          </a:p>
-        </p:txBody>
-      </p:sp>
-      <p:sp>
-        <p:nvSpPr>
-          <p:cNvPr id="13" name="Tekst_26">
-            <a:extLst>
-              <a:ext uri="{FF2B5EF4-FFF2-40B4-BE49-F238E27FC236}">
-                <a16:creationId xmlns:a16="http://schemas.microsoft.com/office/drawing/2014/main" id="{ADF51453-1BFB-446B-BEA0-9226207B0EEB}"/>
-              </a:ext>
-            </a:extLst>
-          </p:cNvPr>
-          <p:cNvSpPr>
-            <a:spLocks noGrp="1"/>
-          </p:cNvSpPr>
-          <p:nvPr/>
-        </p:nvSpPr>
-        <p:spPr>
-          <a:xfrm>
-            <a:off x="1257300" y="6076950"/>
-            <a:ext cx="7600950" cy="457200"/>
-          </a:xfrm>
-          <a:prstGeom prst="rect">
-            <a:avLst/>
-          </a:prstGeom>
-          <a:noFill/>
-          <a:ln w="0">
-            <a:noFill/>
-          </a:ln>
-        </p:spPr>
-        <p:txBody>
-          <a:bodyPr wrap="square" lIns="0" tIns="0" rIns="0" bIns="0" anchor="t">
-            <a:noAutofit/>
-          </a:bodyPr>
-          <a:lstStyle>
-            <a:defPPr algn="l">
-              <a:defRPr sz="1575" b="1">
-                <a:solidFill>
-                  <a:srgbClr val="004785"/>
-                </a:solidFill>
-                <a:latin typeface="Arial"/>
-                <a:ea typeface="Arial"/>
-                <a:cs typeface="Arial"/>
-              </a:defRPr>
-            </a:defPPr>
-          </a:lstStyle>
-          <a:p>
-            <a:pPr algn="l">
-              <a:defRPr sz="1575" b="1">
-                <a:solidFill>
-                  <a:srgbClr val="004785"/>
-                </a:solidFill>
-                <a:latin typeface="Arial"/>
-                <a:ea typeface="Arial"/>
-                <a:cs typeface="Arial"/>
-              </a:defRPr>
-            </a:pPr>
-            <a:r>
-              <a:t>join() ustala kolejność instrukcji wewnątrz korutyny rodzica.</a:t>
             </a:r>
           </a:p>
         </p:txBody>
@@ -29379,7 +29324,64 @@
               </a:defRPr>
             </a:pPr>
             <a:r>
-              <a:t>Deferred&lt;T&gt; jest także Job: można sprawdzić jego stan i go anulować.</a:t>
+              <a:rPr dirty="0"/>
+              <a:t>Deferred&lt;T&gt; jest </a:t>
+            </a:r>
+            <a:r>
+              <a:rPr dirty="0" err="1"/>
+              <a:t>także</a:t>
+            </a:r>
+            <a:r>
+              <a:rPr dirty="0"/>
+              <a:t> </a:t>
+            </a:r>
+            <a:r>
+              <a:rPr lang="pl-PL" dirty="0"/>
+              <a:t>typu </a:t>
+            </a:r>
+            <a:r>
+              <a:rPr dirty="0"/>
+              <a:t>Job: </a:t>
+            </a:r>
+            <a:r>
+              <a:rPr dirty="0" err="1"/>
+              <a:t>można</a:t>
+            </a:r>
+            <a:r>
+              <a:rPr dirty="0"/>
+              <a:t> </a:t>
+            </a:r>
+            <a:r>
+              <a:rPr dirty="0" err="1"/>
+              <a:t>sprawdzić</a:t>
+            </a:r>
+            <a:r>
+              <a:rPr dirty="0"/>
+              <a:t> </a:t>
+            </a:r>
+            <a:r>
+              <a:rPr dirty="0" err="1"/>
+              <a:t>jego</a:t>
+            </a:r>
+            <a:r>
+              <a:rPr dirty="0"/>
+              <a:t> stan </a:t>
+            </a:r>
+            <a:r>
+              <a:rPr dirty="0" err="1"/>
+              <a:t>i</a:t>
+            </a:r>
+            <a:r>
+              <a:rPr dirty="0"/>
+              <a:t> go </a:t>
+            </a:r>
+            <a:r>
+              <a:rPr dirty="0" err="1"/>
+              <a:t>anulować</a:t>
+            </a:r>
+            <a:r>
+              <a:rPr dirty="0"/>
+              <a:t>.</a:t>
             </a:r>
           </a:p>
         </p:txBody>
@@ -31038,66 +31040,6 @@
           </a:p>
         </p:txBody>
       </p:sp>
-      <p:sp>
-        <p:nvSpPr>
-          <p:cNvPr id="14" name="Tekst_72">
-            <a:extLst>
-              <a:ext uri="{FF2B5EF4-FFF2-40B4-BE49-F238E27FC236}">
-                <a16:creationId xmlns:a16="http://schemas.microsoft.com/office/drawing/2014/main" id="{7C560DA7-F0AD-413F-BD1B-E151F5D8B5B3}"/>
-              </a:ext>
-            </a:extLst>
-          </p:cNvPr>
-          <p:cNvSpPr>
-            <a:spLocks noGrp="1"/>
-          </p:cNvSpPr>
-          <p:nvPr/>
-        </p:nvSpPr>
-        <p:spPr>
-          <a:xfrm>
-            <a:off x="1257300" y="6076950"/>
-            <a:ext cx="7600950" cy="457200"/>
-          </a:xfrm>
-          <a:prstGeom prst="rect">
-            <a:avLst/>
-          </a:prstGeom>
-          <a:noFill/>
-          <a:ln w="0">
-            <a:noFill/>
-          </a:ln>
-        </p:spPr>
-        <p:txBody>
-          <a:bodyPr wrap="square" lIns="0" tIns="0" rIns="0" bIns="0" anchor="t">
-            <a:noAutofit/>
-          </a:bodyPr>
-          <a:lstStyle>
-            <a:defPPr algn="l">
-              <a:defRPr sz="1575" b="1">
-                <a:solidFill>
-                  <a:srgbClr val="004785"/>
-                </a:solidFill>
-                <a:latin typeface="Arial"/>
-                <a:ea typeface="Arial"/>
-                <a:cs typeface="Arial"/>
-              </a:defRPr>
-            </a:defPPr>
-          </a:lstStyle>
-          <a:p>
-            <a:pPr algn="l">
-              <a:defRPr sz="1575" b="1">
-                <a:solidFill>
-                  <a:srgbClr val="004785"/>
-                </a:solidFill>
-                <a:latin typeface="Arial"/>
-                <a:ea typeface="Arial"/>
-                <a:cs typeface="Arial"/>
-              </a:defRPr>
-            </a:pPr>
-            <a:r>
-              <a:t>async przydaje się, gdy chcemy uruchomić pracę współbieżnie.</a:t>
-            </a:r>
-          </a:p>
-        </p:txBody>
-      </p:sp>
     </p:spTree>
     <p:extLst>
       <p:ext uri="{BB962C8B-B14F-4D97-AF65-F5344CB8AC3E}">
@@ -32296,66 +32238,6 @@
           </a:p>
         </p:txBody>
       </p:sp>
-      <p:sp>
-        <p:nvSpPr>
-          <p:cNvPr id="16" name="Tekst_82">
-            <a:extLst>
-              <a:ext uri="{FF2B5EF4-FFF2-40B4-BE49-F238E27FC236}">
-                <a16:creationId xmlns:a16="http://schemas.microsoft.com/office/drawing/2014/main" id="{E5384C27-4B07-4CC2-8B5D-25952CC09221}"/>
-              </a:ext>
-            </a:extLst>
-          </p:cNvPr>
-          <p:cNvSpPr>
-            <a:spLocks noGrp="1"/>
-          </p:cNvSpPr>
-          <p:nvPr/>
-        </p:nvSpPr>
-        <p:spPr>
-          <a:xfrm>
-            <a:off x="1257300" y="6076950"/>
-            <a:ext cx="7600950" cy="457200"/>
-          </a:xfrm>
-          <a:prstGeom prst="rect">
-            <a:avLst/>
-          </a:prstGeom>
-          <a:noFill/>
-          <a:ln w="0">
-            <a:noFill/>
-          </a:ln>
-        </p:spPr>
-        <p:txBody>
-          <a:bodyPr wrap="square" lIns="0" tIns="0" rIns="0" bIns="0" anchor="t">
-            <a:noAutofit/>
-          </a:bodyPr>
-          <a:lstStyle>
-            <a:defPPr algn="l">
-              <a:defRPr sz="1575" b="1">
-                <a:solidFill>
-                  <a:srgbClr val="004785"/>
-                </a:solidFill>
-                <a:latin typeface="Arial"/>
-                <a:ea typeface="Arial"/>
-                <a:cs typeface="Arial"/>
-              </a:defRPr>
-            </a:defPPr>
-          </a:lstStyle>
-          <a:p>
-            <a:pPr algn="l">
-              <a:defRPr sz="1575" b="1">
-                <a:solidFill>
-                  <a:srgbClr val="004785"/>
-                </a:solidFill>
-                <a:latin typeface="Arial"/>
-                <a:ea typeface="Arial"/>
-                <a:cs typeface="Arial"/>
-              </a:defRPr>
-            </a:pPr>
-            <a:r>
-              <a:t>Obsługę błędu umieszczamy wokół wywołania całej operacji.</a:t>
-            </a:r>
-          </a:p>
-        </p:txBody>
-      </p:sp>
     </p:spTree>
     <p:extLst>
       <p:ext uri="{BB962C8B-B14F-4D97-AF65-F5344CB8AC3E}">
@@ -33391,66 +33273,6 @@
             </a:pPr>
             <a:r>
               <a:t>Blokujące operacje wejścia–wyjścia.</a:t>
-            </a:r>
-          </a:p>
-        </p:txBody>
-      </p:sp>
-      <p:sp>
-        <p:nvSpPr>
-          <p:cNvPr id="15" name="Tekst_102">
-            <a:extLst>
-              <a:ext uri="{FF2B5EF4-FFF2-40B4-BE49-F238E27FC236}">
-                <a16:creationId xmlns:a16="http://schemas.microsoft.com/office/drawing/2014/main" id="{7900D4B2-8C1B-4F74-A8F6-1863E4072F31}"/>
-              </a:ext>
-            </a:extLst>
-          </p:cNvPr>
-          <p:cNvSpPr>
-            <a:spLocks noGrp="1"/>
-          </p:cNvSpPr>
-          <p:nvPr/>
-        </p:nvSpPr>
-        <p:spPr>
-          <a:xfrm>
-            <a:off x="1257300" y="6076950"/>
-            <a:ext cx="7600950" cy="457200"/>
-          </a:xfrm>
-          <a:prstGeom prst="rect">
-            <a:avLst/>
-          </a:prstGeom>
-          <a:noFill/>
-          <a:ln w="0">
-            <a:noFill/>
-          </a:ln>
-        </p:spPr>
-        <p:txBody>
-          <a:bodyPr wrap="square" lIns="0" tIns="0" rIns="0" bIns="0" anchor="t">
-            <a:noAutofit/>
-          </a:bodyPr>
-          <a:lstStyle>
-            <a:defPPr algn="l">
-              <a:defRPr sz="1575" b="1">
-                <a:solidFill>
-                  <a:srgbClr val="004785"/>
-                </a:solidFill>
-                <a:latin typeface="Arial"/>
-                <a:ea typeface="Arial"/>
-                <a:cs typeface="Arial"/>
-              </a:defRPr>
-            </a:defPPr>
-          </a:lstStyle>
-          <a:p>
-            <a:pPr algn="l">
-              <a:defRPr sz="1575" b="1">
-                <a:solidFill>
-                  <a:srgbClr val="004785"/>
-                </a:solidFill>
-                <a:latin typeface="Arial"/>
-                <a:ea typeface="Arial"/>
-                <a:cs typeface="Arial"/>
-              </a:defRPr>
-            </a:pPr>
-            <a:r>
-              <a:t>withContext zwraca wynik i po zakończeniu przywraca kontekst wywołujący.</a:t>
             </a:r>
           </a:p>
         </p:txBody>
